--- a/textbook/ppt/chapter15_ppt.pptx
+++ b/textbook/ppt/chapter15_ppt.pptx
@@ -7,6 +7,12 @@
   <p:sldIdLst>
     <p:sldId id="256" r:id="rId7"/>
     <p:sldId id="257" r:id="rId8"/>
+    <p:sldId id="258" r:id="rId9"/>
+    <p:sldId id="259" r:id="rId10"/>
+    <p:sldId id="260" r:id="rId11"/>
+    <p:sldId id="261" r:id="rId12"/>
+    <p:sldId id="262" r:id="rId13"/>
+    <p:sldId id="263" r:id="rId14"/>
   </p:sldIdLst>
   <p:sldSz cx="12188952" cy="6858000" type="screen4x3"/>
   <p:notesSz cx="6858000" cy="9144000"/>
@@ -3235,6 +3241,632 @@
             <a:r>
               <a:rPr sz="1800"/>
               <a:t>• 树形DP的基本概念与应用</a:t>
+            </a:r>
+          </a:p>
+        </p:txBody>
+      </p:sp>
+    </p:spTree>
+  </p:cSld>
+  <p:clrMapOvr>
+    <a:masterClrMapping/>
+  </p:clrMapOvr>
+</p:sld>
+</file>
+
+<file path=ppt/slides/slide3.xml><?xml version="1.0" encoding="utf-8"?>
+<p:sld xmlns:a="http://schemas.openxmlformats.org/drawingml/2006/main" xmlns:p="http://schemas.openxmlformats.org/presentationml/2006/main" xmlns:r="http://schemas.openxmlformats.org/officeDocument/2006/relationships">
+  <p:cSld>
+    <p:spTree>
+      <p:nvGrpSpPr>
+        <p:cNvPr id="1" name=""/>
+        <p:cNvGrpSpPr/>
+        <p:nvPr/>
+      </p:nvGrpSpPr>
+      <p:grpSpPr/>
+      <p:sp>
+        <p:nvSpPr>
+          <p:cNvPr id="2" name="TextBox 1"/>
+          <p:cNvSpPr txBox="1"/>
+          <p:nvPr/>
+        </p:nvSpPr>
+        <p:spPr>
+          <a:xfrm>
+            <a:off x="914400" y="457200"/>
+            <a:ext cx="10058400" cy="914400"/>
+          </a:xfrm>
+          <a:prstGeom prst="rect">
+            <a:avLst/>
+          </a:prstGeom>
+          <a:noFill/>
+        </p:spPr>
+        <p:txBody>
+          <a:bodyPr wrap="none">
+            <a:spAutoFit/>
+          </a:bodyPr>
+          <a:lstStyle/>
+          <a:p>
+            <a:r>
+              <a:rPr sz="2800" b="1">
+                <a:solidFill>
+                  <a:srgbClr val="8B0000"/>
+                </a:solidFill>
+              </a:rPr>
+              <a:t>本章概览</a:t>
+            </a:r>
+          </a:p>
+        </p:txBody>
+      </p:sp>
+      <p:sp>
+        <p:nvSpPr>
+          <p:cNvPr id="3" name="TextBox 2"/>
+          <p:cNvSpPr txBox="1"/>
+          <p:nvPr/>
+        </p:nvSpPr>
+        <p:spPr>
+          <a:xfrm>
+            <a:off x="914400" y="1371600"/>
+            <a:ext cx="10058400" cy="5029200"/>
+          </a:xfrm>
+          <a:prstGeom prst="rect">
+            <a:avLst/>
+          </a:prstGeom>
+          <a:noFill/>
+        </p:spPr>
+        <p:txBody>
+          <a:bodyPr wrap="none">
+            <a:spAutoFit/>
+          </a:bodyPr>
+          <a:lstStyle/>
+          <a:p/>
+          <a:p>
+            <a:r>
+              <a:rPr sz="1600">
+                <a:solidFill>
+                  <a:srgbClr val="000000"/>
+                </a:solidFill>
+              </a:rPr>
+              <a:t>DP = 递归 + 记忆化 = 递推填表</a:t>
+            </a:r>
+          </a:p>
+          <a:p>
+            <a:r>
+              <a:rPr sz="1600">
+                <a:solidFill>
+                  <a:srgbClr val="000000"/>
+                </a:solidFill>
+              </a:rPr>
+              <a:t>01背包：每件选或不选，逆序遍历容量</a:t>
+            </a:r>
+          </a:p>
+          <a:p>
+            <a:r>
+              <a:rPr sz="1600">
+                <a:solidFill>
+                  <a:srgbClr val="000000"/>
+                </a:solidFill>
+              </a:rPr>
+              <a:t>完全背包：每件无限选，正序遍历容量</a:t>
+            </a:r>
+          </a:p>
+          <a:p>
+            <a:r>
+              <a:rPr sz="1600">
+                <a:solidFill>
+                  <a:srgbClr val="000000"/>
+                </a:solidFill>
+              </a:rPr>
+              <a:t>状态压缩DP：用二进制表示状态</a:t>
+            </a:r>
+          </a:p>
+        </p:txBody>
+      </p:sp>
+    </p:spTree>
+  </p:cSld>
+  <p:clrMapOvr>
+    <a:masterClrMapping/>
+  </p:clrMapOvr>
+</p:sld>
+</file>
+
+<file path=ppt/slides/slide4.xml><?xml version="1.0" encoding="utf-8"?>
+<p:sld xmlns:a="http://schemas.openxmlformats.org/drawingml/2006/main" xmlns:p="http://schemas.openxmlformats.org/presentationml/2006/main" xmlns:r="http://schemas.openxmlformats.org/officeDocument/2006/relationships">
+  <p:cSld>
+    <p:spTree>
+      <p:nvGrpSpPr>
+        <p:cNvPr id="1" name=""/>
+        <p:cNvGrpSpPr/>
+        <p:nvPr/>
+      </p:nvGrpSpPr>
+      <p:grpSpPr/>
+      <p:sp>
+        <p:nvSpPr>
+          <p:cNvPr id="2" name="TextBox 1"/>
+          <p:cNvSpPr txBox="1"/>
+          <p:nvPr/>
+        </p:nvSpPr>
+        <p:spPr>
+          <a:xfrm>
+            <a:off x="914400" y="457200"/>
+            <a:ext cx="10058400" cy="914400"/>
+          </a:xfrm>
+          <a:prstGeom prst="rect">
+            <a:avLst/>
+          </a:prstGeom>
+          <a:noFill/>
+        </p:spPr>
+        <p:txBody>
+          <a:bodyPr wrap="none">
+            <a:spAutoFit/>
+          </a:bodyPr>
+          <a:lstStyle/>
+          <a:p>
+            <a:r>
+              <a:rPr sz="2800" b="1">
+                <a:solidFill>
+                  <a:srgbClr val="8B0000"/>
+                </a:solidFill>
+              </a:rPr>
+              <a:t>C++ 代码示例</a:t>
+            </a:r>
+          </a:p>
+        </p:txBody>
+      </p:sp>
+      <p:sp>
+        <p:nvSpPr>
+          <p:cNvPr id="3" name="TextBox 2"/>
+          <p:cNvSpPr txBox="1"/>
+          <p:nvPr/>
+        </p:nvSpPr>
+        <p:spPr>
+          <a:xfrm>
+            <a:off x="914400" y="1371600"/>
+            <a:ext cx="10058400" cy="5029200"/>
+          </a:xfrm>
+          <a:prstGeom prst="rect">
+            <a:avLst/>
+          </a:prstGeom>
+          <a:noFill/>
+        </p:spPr>
+        <p:txBody>
+          <a:bodyPr wrap="none">
+            <a:spAutoFit/>
+          </a:bodyPr>
+          <a:lstStyle/>
+          <a:p/>
+          <a:p>
+            <a:r>
+              <a:rPr sz="1400">
+                <a:solidFill>
+                  <a:srgbClr val="000000"/>
+                </a:solidFill>
+              </a:rPr>
+              <a:t>int dp[1001];
+for (int i = 0; i &lt; n; i++)
+    for (int j = V; j &gt;= v[i]; j--)
+        dp[j] = max(dp[j], dp[j-v[i]] + w[i]);</a:t>
+            </a:r>
+          </a:p>
+        </p:txBody>
+      </p:sp>
+    </p:spTree>
+  </p:cSld>
+  <p:clrMapOvr>
+    <a:masterClrMapping/>
+  </p:clrMapOvr>
+</p:sld>
+</file>
+
+<file path=ppt/slides/slide5.xml><?xml version="1.0" encoding="utf-8"?>
+<p:sld xmlns:a="http://schemas.openxmlformats.org/drawingml/2006/main" xmlns:p="http://schemas.openxmlformats.org/presentationml/2006/main" xmlns:r="http://schemas.openxmlformats.org/officeDocument/2006/relationships">
+  <p:cSld>
+    <p:spTree>
+      <p:nvGrpSpPr>
+        <p:cNvPr id="1" name=""/>
+        <p:cNvGrpSpPr/>
+        <p:nvPr/>
+      </p:nvGrpSpPr>
+      <p:grpSpPr/>
+      <p:sp>
+        <p:nvSpPr>
+          <p:cNvPr id="2" name="TextBox 1"/>
+          <p:cNvSpPr txBox="1"/>
+          <p:nvPr/>
+        </p:nvSpPr>
+        <p:spPr>
+          <a:xfrm>
+            <a:off x="914400" y="457200"/>
+            <a:ext cx="10058400" cy="914400"/>
+          </a:xfrm>
+          <a:prstGeom prst="rect">
+            <a:avLst/>
+          </a:prstGeom>
+          <a:noFill/>
+        </p:spPr>
+        <p:txBody>
+          <a:bodyPr wrap="none">
+            <a:spAutoFit/>
+          </a:bodyPr>
+          <a:lstStyle/>
+          <a:p>
+            <a:r>
+              <a:rPr sz="2800" b="1">
+                <a:solidFill>
+                  <a:srgbClr val="8B0000"/>
+                </a:solidFill>
+              </a:rPr>
+              <a:t>Python 代码示例</a:t>
+            </a:r>
+          </a:p>
+        </p:txBody>
+      </p:sp>
+      <p:sp>
+        <p:nvSpPr>
+          <p:cNvPr id="3" name="TextBox 2"/>
+          <p:cNvSpPr txBox="1"/>
+          <p:nvPr/>
+        </p:nvSpPr>
+        <p:spPr>
+          <a:xfrm>
+            <a:off x="914400" y="1371600"/>
+            <a:ext cx="10058400" cy="5029200"/>
+          </a:xfrm>
+          <a:prstGeom prst="rect">
+            <a:avLst/>
+          </a:prstGeom>
+          <a:noFill/>
+        </p:spPr>
+        <p:txBody>
+          <a:bodyPr wrap="none">
+            <a:spAutoFit/>
+          </a:bodyPr>
+          <a:lstStyle/>
+          <a:p/>
+          <a:p>
+            <a:r>
+              <a:rPr sz="1400">
+                <a:solidFill>
+                  <a:srgbClr val="000000"/>
+                </a:solidFill>
+              </a:rPr>
+              <a:t>dp = [0] * (V+1)
+for i in range(n):
+    for j in range(V, v[i]-1, -1):
+        dp[j] = max(dp[j], dp[j-v[i]] + w[i])</a:t>
+            </a:r>
+          </a:p>
+        </p:txBody>
+      </p:sp>
+    </p:spTree>
+  </p:cSld>
+  <p:clrMapOvr>
+    <a:masterClrMapping/>
+  </p:clrMapOvr>
+</p:sld>
+</file>
+
+<file path=ppt/slides/slide6.xml><?xml version="1.0" encoding="utf-8"?>
+<p:sld xmlns:a="http://schemas.openxmlformats.org/drawingml/2006/main" xmlns:p="http://schemas.openxmlformats.org/presentationml/2006/main" xmlns:r="http://schemas.openxmlformats.org/officeDocument/2006/relationships">
+  <p:cSld>
+    <p:spTree>
+      <p:nvGrpSpPr>
+        <p:cNvPr id="1" name=""/>
+        <p:cNvGrpSpPr/>
+        <p:nvPr/>
+      </p:nvGrpSpPr>
+      <p:grpSpPr/>
+      <p:sp>
+        <p:nvSpPr>
+          <p:cNvPr id="2" name="TextBox 1"/>
+          <p:cNvSpPr txBox="1"/>
+          <p:nvPr/>
+        </p:nvSpPr>
+        <p:spPr>
+          <a:xfrm>
+            <a:off x="914400" y="457200"/>
+            <a:ext cx="10058400" cy="914400"/>
+          </a:xfrm>
+          <a:prstGeom prst="rect">
+            <a:avLst/>
+          </a:prstGeom>
+          <a:noFill/>
+        </p:spPr>
+        <p:txBody>
+          <a:bodyPr wrap="none">
+            <a:spAutoFit/>
+          </a:bodyPr>
+          <a:lstStyle/>
+          <a:p>
+            <a:r>
+              <a:rPr sz="2800" b="1">
+                <a:solidFill>
+                  <a:srgbClr val="8B0000"/>
+                </a:solidFill>
+              </a:rPr>
+              <a:t>常见错误</a:t>
+            </a:r>
+          </a:p>
+        </p:txBody>
+      </p:sp>
+      <p:sp>
+        <p:nvSpPr>
+          <p:cNvPr id="3" name="TextBox 2"/>
+          <p:cNvSpPr txBox="1"/>
+          <p:nvPr/>
+        </p:nvSpPr>
+        <p:spPr>
+          <a:xfrm>
+            <a:off x="914400" y="1371600"/>
+            <a:ext cx="10058400" cy="5029200"/>
+          </a:xfrm>
+          <a:prstGeom prst="rect">
+            <a:avLst/>
+          </a:prstGeom>
+          <a:noFill/>
+        </p:spPr>
+        <p:txBody>
+          <a:bodyPr wrap="none">
+            <a:spAutoFit/>
+          </a:bodyPr>
+          <a:lstStyle/>
+          <a:p/>
+          <a:p>
+            <a:r>
+              <a:rPr sz="1600">
+                <a:solidFill>
+                  <a:srgbClr val="000000"/>
+                </a:solidFill>
+              </a:rPr>
+              <a:t>01背包必须逆序遍历容量</a:t>
+            </a:r>
+          </a:p>
+          <a:p>
+            <a:r>
+              <a:rPr sz="1600">
+                <a:solidFill>
+                  <a:srgbClr val="000000"/>
+                </a:solidFill>
+              </a:rPr>
+              <a:t>完全背包必须正序遍历容量</a:t>
+            </a:r>
+          </a:p>
+          <a:p>
+            <a:r>
+              <a:rPr sz="1600">
+                <a:solidFill>
+                  <a:srgbClr val="000000"/>
+                </a:solidFill>
+              </a:rPr>
+              <a:t>状态定义不清晰导致转移方程错误</a:t>
+            </a:r>
+          </a:p>
+          <a:p>
+            <a:r>
+              <a:rPr sz="1600">
+                <a:solidFill>
+                  <a:srgbClr val="000000"/>
+                </a:solidFill>
+              </a:rPr>
+              <a:t>边界条件：dp[0]初始化</a:t>
+            </a:r>
+          </a:p>
+        </p:txBody>
+      </p:sp>
+    </p:spTree>
+  </p:cSld>
+  <p:clrMapOvr>
+    <a:masterClrMapping/>
+  </p:clrMapOvr>
+</p:sld>
+</file>
+
+<file path=ppt/slides/slide7.xml><?xml version="1.0" encoding="utf-8"?>
+<p:sld xmlns:a="http://schemas.openxmlformats.org/drawingml/2006/main" xmlns:p="http://schemas.openxmlformats.org/presentationml/2006/main" xmlns:r="http://schemas.openxmlformats.org/officeDocument/2006/relationships">
+  <p:cSld>
+    <p:spTree>
+      <p:nvGrpSpPr>
+        <p:cNvPr id="1" name=""/>
+        <p:cNvGrpSpPr/>
+        <p:nvPr/>
+      </p:nvGrpSpPr>
+      <p:grpSpPr/>
+      <p:sp>
+        <p:nvSpPr>
+          <p:cNvPr id="2" name="TextBox 1"/>
+          <p:cNvSpPr txBox="1"/>
+          <p:nvPr/>
+        </p:nvSpPr>
+        <p:spPr>
+          <a:xfrm>
+            <a:off x="914400" y="457200"/>
+            <a:ext cx="10058400" cy="914400"/>
+          </a:xfrm>
+          <a:prstGeom prst="rect">
+            <a:avLst/>
+          </a:prstGeom>
+          <a:noFill/>
+        </p:spPr>
+        <p:txBody>
+          <a:bodyPr wrap="none">
+            <a:spAutoFit/>
+          </a:bodyPr>
+          <a:lstStyle/>
+          <a:p>
+            <a:r>
+              <a:rPr sz="2800" b="1">
+                <a:solidFill>
+                  <a:srgbClr val="8B0000"/>
+                </a:solidFill>
+              </a:rPr>
+              <a:t>练习题目</a:t>
+            </a:r>
+          </a:p>
+        </p:txBody>
+      </p:sp>
+      <p:sp>
+        <p:nvSpPr>
+          <p:cNvPr id="3" name="TextBox 2"/>
+          <p:cNvSpPr txBox="1"/>
+          <p:nvPr/>
+        </p:nvSpPr>
+        <p:spPr>
+          <a:xfrm>
+            <a:off x="914400" y="1371600"/>
+            <a:ext cx="10058400" cy="5029200"/>
+          </a:xfrm>
+          <a:prstGeom prst="rect">
+            <a:avLst/>
+          </a:prstGeom>
+          <a:noFill/>
+        </p:spPr>
+        <p:txBody>
+          <a:bodyPr wrap="none">
+            <a:spAutoFit/>
+          </a:bodyPr>
+          <a:lstStyle/>
+          <a:p/>
+          <a:p>
+            <a:r>
+              <a:rPr sz="1600">
+                <a:solidFill>
+                  <a:srgbClr val="000000"/>
+                </a:solidFill>
+              </a:rPr>
+              <a:t>JD155 一剑一鞘</a:t>
+            </a:r>
+          </a:p>
+          <a:p>
+            <a:r>
+              <a:rPr sz="1600">
+                <a:solidFill>
+                  <a:srgbClr val="000000"/>
+                </a:solidFill>
+              </a:rPr>
+              <a:t>JD163 背包叠甲</a:t>
+            </a:r>
+          </a:p>
+          <a:p>
+            <a:r>
+              <a:rPr sz="1600">
+                <a:solidFill>
+                  <a:srgbClr val="000000"/>
+                </a:solidFill>
+              </a:rPr>
+              <a:t>JD172 千机棋局</a:t>
+            </a:r>
+          </a:p>
+        </p:txBody>
+      </p:sp>
+    </p:spTree>
+  </p:cSld>
+  <p:clrMapOvr>
+    <a:masterClrMapping/>
+  </p:clrMapOvr>
+</p:sld>
+</file>
+
+<file path=ppt/slides/slide8.xml><?xml version="1.0" encoding="utf-8"?>
+<p:sld xmlns:a="http://schemas.openxmlformats.org/drawingml/2006/main" xmlns:p="http://schemas.openxmlformats.org/presentationml/2006/main" xmlns:r="http://schemas.openxmlformats.org/officeDocument/2006/relationships">
+  <p:cSld>
+    <p:spTree>
+      <p:nvGrpSpPr>
+        <p:cNvPr id="1" name=""/>
+        <p:cNvGrpSpPr/>
+        <p:nvPr/>
+      </p:nvGrpSpPr>
+      <p:grpSpPr/>
+      <p:sp>
+        <p:nvSpPr>
+          <p:cNvPr id="2" name="TextBox 1"/>
+          <p:cNvSpPr txBox="1"/>
+          <p:nvPr/>
+        </p:nvSpPr>
+        <p:spPr>
+          <a:xfrm>
+            <a:off x="914400" y="457200"/>
+            <a:ext cx="10058400" cy="914400"/>
+          </a:xfrm>
+          <a:prstGeom prst="rect">
+            <a:avLst/>
+          </a:prstGeom>
+          <a:noFill/>
+        </p:spPr>
+        <p:txBody>
+          <a:bodyPr wrap="none">
+            <a:spAutoFit/>
+          </a:bodyPr>
+          <a:lstStyle/>
+          <a:p>
+            <a:r>
+              <a:rPr sz="2800" b="1">
+                <a:solidFill>
+                  <a:srgbClr val="8B0000"/>
+                </a:solidFill>
+              </a:rPr>
+              <a:t>本章小结</a:t>
+            </a:r>
+          </a:p>
+        </p:txBody>
+      </p:sp>
+      <p:sp>
+        <p:nvSpPr>
+          <p:cNvPr id="3" name="TextBox 2"/>
+          <p:cNvSpPr txBox="1"/>
+          <p:nvPr/>
+        </p:nvSpPr>
+        <p:spPr>
+          <a:xfrm>
+            <a:off x="914400" y="1371600"/>
+            <a:ext cx="10058400" cy="5029200"/>
+          </a:xfrm>
+          <a:prstGeom prst="rect">
+            <a:avLst/>
+          </a:prstGeom>
+          <a:noFill/>
+        </p:spPr>
+        <p:txBody>
+          <a:bodyPr wrap="none">
+            <a:spAutoFit/>
+          </a:bodyPr>
+          <a:lstStyle/>
+          <a:p/>
+          <a:p>
+            <a:r>
+              <a:rPr sz="1600">
+                <a:solidFill>
+                  <a:srgbClr val="000000"/>
+                </a:solidFill>
+              </a:rPr>
+              <a:t>掌握核心概念</a:t>
+            </a:r>
+          </a:p>
+          <a:p>
+            <a:r>
+              <a:rPr sz="1600">
+                <a:solidFill>
+                  <a:srgbClr val="000000"/>
+                </a:solidFill>
+              </a:rPr>
+              <a:t>多做练习</a:t>
+            </a:r>
+          </a:p>
+          <a:p>
+            <a:r>
+              <a:rPr sz="1600">
+                <a:solidFill>
+                  <a:srgbClr val="000000"/>
+                </a:solidFill>
+              </a:rPr>
+              <a:t>注意边界条件</a:t>
+            </a:r>
+          </a:p>
+          <a:p>
+            <a:r>
+              <a:rPr sz="1600">
+                <a:solidFill>
+                  <a:srgbClr val="000000"/>
+                </a:solidFill>
+              </a:rPr>
+              <a:t>理解算法思想而非死记代码</a:t>
             </a:r>
           </a:p>
         </p:txBody>

--- a/textbook/ppt/chapter15_ppt.pptx
+++ b/textbook/ppt/chapter15_ppt.pptx
@@ -12,7 +12,6 @@
     <p:sldId id="260" r:id="rId11"/>
     <p:sldId id="261" r:id="rId12"/>
     <p:sldId id="262" r:id="rId13"/>
-    <p:sldId id="263" r:id="rId14"/>
   </p:sldIdLst>
   <p:sldSz cx="12188952" cy="6858000" type="screen4x3"/>
   <p:notesSz cx="6858000" cy="9144000"/>
@@ -3124,18 +3123,7 @@
                   <a:srgbClr val="8B0000"/>
                 </a:solidFill>
               </a:rPr>
-              <a:t>第15章 华山论剑</a:t>
-            </a:r>
-          </a:p>
-          <a:p>
-            <a:pPr algn="ctr"/>
-            <a:r>
-              <a:rPr sz="2400">
-                <a:solidFill>
-                  <a:srgbClr val="6B5D4D"/>
-                </a:solidFill>
-              </a:rPr>
-              <a:t>动态规划</a:t>
+              <a:t>第15章</a:t>
             </a:r>
           </a:p>
         </p:txBody>
@@ -3166,8 +3154,8 @@
         </p:nvSpPr>
         <p:spPr>
           <a:xfrm>
-            <a:off x="914400" y="457200"/>
-            <a:ext cx="10058400" cy="914400"/>
+            <a:off x="457200" y="274320"/>
+            <a:ext cx="10972800" cy="731520"/>
           </a:xfrm>
           <a:prstGeom prst="rect">
             <a:avLst/>
@@ -3181,7 +3169,7 @@
           <a:lstStyle/>
           <a:p>
             <a:r>
-              <a:rPr sz="2800" b="1">
+              <a:rPr sz="2400" b="1">
                 <a:solidFill>
                   <a:srgbClr val="8B0000"/>
                 </a:solidFill>
@@ -3199,8 +3187,8 @@
         </p:nvSpPr>
         <p:spPr>
           <a:xfrm>
-            <a:off x="914400" y="1371600"/>
-            <a:ext cx="10058400" cy="4572000"/>
+            <a:off x="457200" y="1097280"/>
+            <a:ext cx="10972800" cy="5029200"/>
           </a:xfrm>
           <a:prstGeom prst="rect">
             <a:avLst/>
@@ -3215,32 +3203,42 @@
           <a:p/>
           <a:p>
             <a:r>
-              <a:rPr sz="1800"/>
-              <a:t>• 01背包的基本概念与应用</a:t>
-            </a:r>
-          </a:p>
-          <a:p>
-            <a:r>
-              <a:rPr sz="1800"/>
-              <a:t>• 完全背包的基本概念与应用</a:t>
-            </a:r>
-          </a:p>
-          <a:p>
-            <a:r>
-              <a:rPr sz="1800"/>
-              <a:t>• 区间DP的基本概念与应用</a:t>
-            </a:r>
-          </a:p>
-          <a:p>
-            <a:r>
-              <a:rPr sz="1800"/>
-              <a:t>• 状压DP的基本概念与应用</a:t>
-            </a:r>
-          </a:p>
-          <a:p>
-            <a:r>
-              <a:rPr sz="1800"/>
-              <a:t>• 树形DP的基本概念与应用</a:t>
+              <a:rPr sz="1400">
+                <a:solidFill>
+                  <a:srgbClr val="000000"/>
+                </a:solidFill>
+              </a:rPr>
+              <a:t>DP = 递归 + 记忆化 = 递推填表</a:t>
+            </a:r>
+          </a:p>
+          <a:p>
+            <a:r>
+              <a:rPr sz="1400">
+                <a:solidFill>
+                  <a:srgbClr val="000000"/>
+                </a:solidFill>
+              </a:rPr>
+              <a:t>01背包：每件选或不选，逆序遍历容量</a:t>
+            </a:r>
+          </a:p>
+          <a:p>
+            <a:r>
+              <a:rPr sz="1400">
+                <a:solidFill>
+                  <a:srgbClr val="000000"/>
+                </a:solidFill>
+              </a:rPr>
+              <a:t>完全背包：每件无限选，正序遍历容量</a:t>
+            </a:r>
+          </a:p>
+          <a:p>
+            <a:r>
+              <a:rPr sz="1400">
+                <a:solidFill>
+                  <a:srgbClr val="000000"/>
+                </a:solidFill>
+              </a:rPr>
+              <a:t>状态压缩DP：用二进制掩码表示状态</a:t>
             </a:r>
           </a:p>
         </p:txBody>
@@ -3271,8 +3269,8 @@
         </p:nvSpPr>
         <p:spPr>
           <a:xfrm>
-            <a:off x="914400" y="457200"/>
-            <a:ext cx="10058400" cy="914400"/>
+            <a:off x="457200" y="274320"/>
+            <a:ext cx="10972800" cy="731520"/>
           </a:xfrm>
           <a:prstGeom prst="rect">
             <a:avLst/>
@@ -3286,12 +3284,12 @@
           <a:lstStyle/>
           <a:p>
             <a:r>
-              <a:rPr sz="2800" b="1">
+              <a:rPr sz="2400" b="1">
                 <a:solidFill>
                   <a:srgbClr val="8B0000"/>
                 </a:solidFill>
               </a:rPr>
-              <a:t>本章概览</a:t>
+              <a:t>C++ 代码示例</a:t>
             </a:r>
           </a:p>
         </p:txBody>
@@ -3304,8 +3302,8 @@
         </p:nvSpPr>
         <p:spPr>
           <a:xfrm>
-            <a:off x="914400" y="1371600"/>
-            <a:ext cx="10058400" cy="5029200"/>
+            <a:off x="457200" y="1097280"/>
+            <a:ext cx="10972800" cy="5029200"/>
           </a:xfrm>
           <a:prstGeom prst="rect">
             <a:avLst/>
@@ -3320,42 +3318,16 @@
           <a:p/>
           <a:p>
             <a:r>
-              <a:rPr sz="1600">
+              <a:rPr sz="1200">
                 <a:solidFill>
                   <a:srgbClr val="000000"/>
                 </a:solidFill>
               </a:rPr>
-              <a:t>DP = 递归 + 记忆化 = 递推填表</a:t>
-            </a:r>
-          </a:p>
-          <a:p>
-            <a:r>
-              <a:rPr sz="1600">
-                <a:solidFill>
-                  <a:srgbClr val="000000"/>
-                </a:solidFill>
-              </a:rPr>
-              <a:t>01背包：每件选或不选，逆序遍历容量</a:t>
-            </a:r>
-          </a:p>
-          <a:p>
-            <a:r>
-              <a:rPr sz="1600">
-                <a:solidFill>
-                  <a:srgbClr val="000000"/>
-                </a:solidFill>
-              </a:rPr>
-              <a:t>完全背包：每件无限选，正序遍历容量</a:t>
-            </a:r>
-          </a:p>
-          <a:p>
-            <a:r>
-              <a:rPr sz="1600">
-                <a:solidFill>
-                  <a:srgbClr val="000000"/>
-                </a:solidFill>
-              </a:rPr>
-              <a:t>状态压缩DP：用二进制表示状态</a:t>
+              <a:t>// 01背包
+int dp[1001];
+for (int i = 0; i &lt; n; i++)
+    for (int j = V; j &gt;= v[i]; j--)
+        dp[j] = max(dp[j], dp[j-v[i]] + w[i]);</a:t>
             </a:r>
           </a:p>
         </p:txBody>
@@ -3386,8 +3358,8 @@
         </p:nvSpPr>
         <p:spPr>
           <a:xfrm>
-            <a:off x="914400" y="457200"/>
-            <a:ext cx="10058400" cy="914400"/>
+            <a:off x="457200" y="274320"/>
+            <a:ext cx="10972800" cy="731520"/>
           </a:xfrm>
           <a:prstGeom prst="rect">
             <a:avLst/>
@@ -3401,12 +3373,12 @@
           <a:lstStyle/>
           <a:p>
             <a:r>
-              <a:rPr sz="2800" b="1">
+              <a:rPr sz="2400" b="1">
                 <a:solidFill>
                   <a:srgbClr val="8B0000"/>
                 </a:solidFill>
               </a:rPr>
-              <a:t>C++ 代码示例</a:t>
+              <a:t>Python 代码示例</a:t>
             </a:r>
           </a:p>
         </p:txBody>
@@ -3419,8 +3391,8 @@
         </p:nvSpPr>
         <p:spPr>
           <a:xfrm>
-            <a:off x="914400" y="1371600"/>
-            <a:ext cx="10058400" cy="5029200"/>
+            <a:off x="457200" y="1097280"/>
+            <a:ext cx="10972800" cy="5029200"/>
           </a:xfrm>
           <a:prstGeom prst="rect">
             <a:avLst/>
@@ -3435,15 +3407,16 @@
           <a:p/>
           <a:p>
             <a:r>
-              <a:rPr sz="1400">
+              <a:rPr sz="1200">
                 <a:solidFill>
                   <a:srgbClr val="000000"/>
                 </a:solidFill>
               </a:rPr>
-              <a:t>int dp[1001];
-for (int i = 0; i &lt; n; i++)
-    for (int j = V; j &gt;= v[i]; j--)
-        dp[j] = max(dp[j], dp[j-v[i]] + w[i]);</a:t>
+              <a:t># 01背包
+dp = [0] * (V+1)
+for i in range(n):
+    for j in range(V, v[i]-1, -1):
+        dp[j] = max(dp[j], dp[j-v[i]] + w[i])</a:t>
             </a:r>
           </a:p>
         </p:txBody>
@@ -3474,8 +3447,8 @@
         </p:nvSpPr>
         <p:spPr>
           <a:xfrm>
-            <a:off x="914400" y="457200"/>
-            <a:ext cx="10058400" cy="914400"/>
+            <a:off x="457200" y="274320"/>
+            <a:ext cx="10972800" cy="731520"/>
           </a:xfrm>
           <a:prstGeom prst="rect">
             <a:avLst/>
@@ -3489,12 +3462,12 @@
           <a:lstStyle/>
           <a:p>
             <a:r>
-              <a:rPr sz="2800" b="1">
+              <a:rPr sz="2400" b="1">
                 <a:solidFill>
                   <a:srgbClr val="8B0000"/>
                 </a:solidFill>
               </a:rPr>
-              <a:t>Python 代码示例</a:t>
+              <a:t>常见错误</a:t>
             </a:r>
           </a:p>
         </p:txBody>
@@ -3507,8 +3480,8 @@
         </p:nvSpPr>
         <p:spPr>
           <a:xfrm>
-            <a:off x="914400" y="1371600"/>
-            <a:ext cx="10058400" cy="5029200"/>
+            <a:off x="457200" y="1097280"/>
+            <a:ext cx="10972800" cy="5029200"/>
           </a:xfrm>
           <a:prstGeom prst="rect">
             <a:avLst/>
@@ -3528,10 +3501,37 @@
                   <a:srgbClr val="000000"/>
                 </a:solidFill>
               </a:rPr>
-              <a:t>dp = [0] * (V+1)
-for i in range(n):
-    for j in range(V, v[i]-1, -1):
-        dp[j] = max(dp[j], dp[j-v[i]] + w[i])</a:t>
+              <a:t>01背包必须逆序遍历容量（否则变成完全背包）</a:t>
+            </a:r>
+          </a:p>
+          <a:p>
+            <a:r>
+              <a:rPr sz="1400">
+                <a:solidFill>
+                  <a:srgbClr val="000000"/>
+                </a:solidFill>
+              </a:rPr>
+              <a:t>完全背包必须正序遍历容量（允许重复选）</a:t>
+            </a:r>
+          </a:p>
+          <a:p>
+            <a:r>
+              <a:rPr sz="1400">
+                <a:solidFill>
+                  <a:srgbClr val="000000"/>
+                </a:solidFill>
+              </a:rPr>
+              <a:t>状态定义不清晰导致转移方程错误</a:t>
+            </a:r>
+          </a:p>
+          <a:p>
+            <a:r>
+              <a:rPr sz="1400">
+                <a:solidFill>
+                  <a:srgbClr val="000000"/>
+                </a:solidFill>
+              </a:rPr>
+              <a:t>边界条件：dp[0]=0 初始化对不对？</a:t>
             </a:r>
           </a:p>
         </p:txBody>
@@ -3562,8 +3562,8 @@
         </p:nvSpPr>
         <p:spPr>
           <a:xfrm>
-            <a:off x="914400" y="457200"/>
-            <a:ext cx="10058400" cy="914400"/>
+            <a:off x="457200" y="274320"/>
+            <a:ext cx="10972800" cy="731520"/>
           </a:xfrm>
           <a:prstGeom prst="rect">
             <a:avLst/>
@@ -3577,12 +3577,12 @@
           <a:lstStyle/>
           <a:p>
             <a:r>
-              <a:rPr sz="2800" b="1">
+              <a:rPr sz="2400" b="1">
                 <a:solidFill>
                   <a:srgbClr val="8B0000"/>
                 </a:solidFill>
               </a:rPr>
-              <a:t>常见错误</a:t>
+              <a:t>练习题目</a:t>
             </a:r>
           </a:p>
         </p:txBody>
@@ -3595,8 +3595,8 @@
         </p:nvSpPr>
         <p:spPr>
           <a:xfrm>
-            <a:off x="914400" y="1371600"/>
-            <a:ext cx="10058400" cy="5029200"/>
+            <a:off x="457200" y="1097280"/>
+            <a:ext cx="10972800" cy="5029200"/>
           </a:xfrm>
           <a:prstGeom prst="rect">
             <a:avLst/>
@@ -3611,42 +3611,32 @@
           <a:p/>
           <a:p>
             <a:r>
-              <a:rPr sz="1600">
+              <a:rPr sz="1400">
                 <a:solidFill>
                   <a:srgbClr val="000000"/>
                 </a:solidFill>
               </a:rPr>
-              <a:t>01背包必须逆序遍历容量</a:t>
-            </a:r>
-          </a:p>
-          <a:p>
-            <a:r>
-              <a:rPr sz="1600">
+              <a:t>JD155 一剑一鞘 - 01背包 (Medium)</a:t>
+            </a:r>
+          </a:p>
+          <a:p>
+            <a:r>
+              <a:rPr sz="1400">
                 <a:solidFill>
                   <a:srgbClr val="000000"/>
                 </a:solidFill>
               </a:rPr>
-              <a:t>完全背包必须正序遍历容量</a:t>
-            </a:r>
-          </a:p>
-          <a:p>
-            <a:r>
-              <a:rPr sz="1600">
+              <a:t>JD163 背包叠甲 - 多重背包 (Hard)</a:t>
+            </a:r>
+          </a:p>
+          <a:p>
+            <a:r>
+              <a:rPr sz="1400">
                 <a:solidFill>
                   <a:srgbClr val="000000"/>
                 </a:solidFill>
               </a:rPr>
-              <a:t>状态定义不清晰导致转移方程错误</a:t>
-            </a:r>
-          </a:p>
-          <a:p>
-            <a:r>
-              <a:rPr sz="1600">
-                <a:solidFill>
-                  <a:srgbClr val="000000"/>
-                </a:solidFill>
-              </a:rPr>
-              <a:t>边界条件：dp[0]初始化</a:t>
+              <a:t>JD172 千机棋局 - 树形DP (Hard)</a:t>
             </a:r>
           </a:p>
         </p:txBody>
@@ -3677,8 +3667,8 @@
         </p:nvSpPr>
         <p:spPr>
           <a:xfrm>
-            <a:off x="914400" y="457200"/>
-            <a:ext cx="10058400" cy="914400"/>
+            <a:off x="457200" y="274320"/>
+            <a:ext cx="10972800" cy="731520"/>
           </a:xfrm>
           <a:prstGeom prst="rect">
             <a:avLst/>
@@ -3692,12 +3682,12 @@
           <a:lstStyle/>
           <a:p>
             <a:r>
-              <a:rPr sz="2800" b="1">
+              <a:rPr sz="2400" b="1">
                 <a:solidFill>
                   <a:srgbClr val="8B0000"/>
                 </a:solidFill>
               </a:rPr>
-              <a:t>练习题目</a:t>
+              <a:t>本章小结</a:t>
             </a:r>
           </a:p>
         </p:txBody>
@@ -3710,8 +3700,8 @@
         </p:nvSpPr>
         <p:spPr>
           <a:xfrm>
-            <a:off x="914400" y="1371600"/>
-            <a:ext cx="10058400" cy="5029200"/>
+            <a:off x="457200" y="1097280"/>
+            <a:ext cx="10972800" cy="5029200"/>
           </a:xfrm>
           <a:prstGeom prst="rect">
             <a:avLst/>
@@ -3726,147 +3716,42 @@
           <a:p/>
           <a:p>
             <a:r>
-              <a:rPr sz="1600">
+              <a:rPr sz="1400">
                 <a:solidFill>
                   <a:srgbClr val="000000"/>
                 </a:solidFill>
               </a:rPr>
-              <a:t>JD155 一剑一鞘</a:t>
-            </a:r>
-          </a:p>
-          <a:p>
-            <a:r>
-              <a:rPr sz="1600">
+              <a:t>本章学习了第15章的核心概念</a:t>
+            </a:r>
+          </a:p>
+          <a:p>
+            <a:r>
+              <a:rPr sz="1400">
                 <a:solidFill>
                   <a:srgbClr val="000000"/>
                 </a:solidFill>
               </a:rPr>
-              <a:t>JD163 背包叠甲</a:t>
-            </a:r>
-          </a:p>
-          <a:p>
-            <a:r>
-              <a:rPr sz="1600">
+              <a:t>多做练习是掌握算法的关键</a:t>
+            </a:r>
+          </a:p>
+          <a:p>
+            <a:r>
+              <a:rPr sz="1400">
                 <a:solidFill>
                   <a:srgbClr val="000000"/>
                 </a:solidFill>
               </a:rPr>
-              <a:t>JD172 千机棋局</a:t>
-            </a:r>
-          </a:p>
-        </p:txBody>
-      </p:sp>
-    </p:spTree>
-  </p:cSld>
-  <p:clrMapOvr>
-    <a:masterClrMapping/>
-  </p:clrMapOvr>
-</p:sld>
-</file>
-
-<file path=ppt/slides/slide8.xml><?xml version="1.0" encoding="utf-8"?>
-<p:sld xmlns:a="http://schemas.openxmlformats.org/drawingml/2006/main" xmlns:p="http://schemas.openxmlformats.org/presentationml/2006/main" xmlns:r="http://schemas.openxmlformats.org/officeDocument/2006/relationships">
-  <p:cSld>
-    <p:spTree>
-      <p:nvGrpSpPr>
-        <p:cNvPr id="1" name=""/>
-        <p:cNvGrpSpPr/>
-        <p:nvPr/>
-      </p:nvGrpSpPr>
-      <p:grpSpPr/>
-      <p:sp>
-        <p:nvSpPr>
-          <p:cNvPr id="2" name="TextBox 1"/>
-          <p:cNvSpPr txBox="1"/>
-          <p:nvPr/>
-        </p:nvSpPr>
-        <p:spPr>
-          <a:xfrm>
-            <a:off x="914400" y="457200"/>
-            <a:ext cx="10058400" cy="914400"/>
-          </a:xfrm>
-          <a:prstGeom prst="rect">
-            <a:avLst/>
-          </a:prstGeom>
-          <a:noFill/>
-        </p:spPr>
-        <p:txBody>
-          <a:bodyPr wrap="none">
-            <a:spAutoFit/>
-          </a:bodyPr>
-          <a:lstStyle/>
-          <a:p>
-            <a:r>
-              <a:rPr sz="2800" b="1">
-                <a:solidFill>
-                  <a:srgbClr val="8B0000"/>
+              <a:t>理解算法思想比死记代码更重要</a:t>
+            </a:r>
+          </a:p>
+          <a:p>
+            <a:r>
+              <a:rPr sz="1400">
+                <a:solidFill>
+                  <a:srgbClr val="000000"/>
                 </a:solidFill>
               </a:rPr>
-              <a:t>本章小结</a:t>
-            </a:r>
-          </a:p>
-        </p:txBody>
-      </p:sp>
-      <p:sp>
-        <p:nvSpPr>
-          <p:cNvPr id="3" name="TextBox 2"/>
-          <p:cNvSpPr txBox="1"/>
-          <p:nvPr/>
-        </p:nvSpPr>
-        <p:spPr>
-          <a:xfrm>
-            <a:off x="914400" y="1371600"/>
-            <a:ext cx="10058400" cy="5029200"/>
-          </a:xfrm>
-          <a:prstGeom prst="rect">
-            <a:avLst/>
-          </a:prstGeom>
-          <a:noFill/>
-        </p:spPr>
-        <p:txBody>
-          <a:bodyPr wrap="none">
-            <a:spAutoFit/>
-          </a:bodyPr>
-          <a:lstStyle/>
-          <a:p/>
-          <a:p>
-            <a:r>
-              <a:rPr sz="1600">
-                <a:solidFill>
-                  <a:srgbClr val="000000"/>
-                </a:solidFill>
-              </a:rPr>
-              <a:t>掌握核心概念</a:t>
-            </a:r>
-          </a:p>
-          <a:p>
-            <a:r>
-              <a:rPr sz="1600">
-                <a:solidFill>
-                  <a:srgbClr val="000000"/>
-                </a:solidFill>
-              </a:rPr>
-              <a:t>多做练习</a:t>
-            </a:r>
-          </a:p>
-          <a:p>
-            <a:r>
-              <a:rPr sz="1600">
-                <a:solidFill>
-                  <a:srgbClr val="000000"/>
-                </a:solidFill>
-              </a:rPr>
-              <a:t>注意边界条件</a:t>
-            </a:r>
-          </a:p>
-          <a:p>
-            <a:r>
-              <a:rPr sz="1600">
-                <a:solidFill>
-                  <a:srgbClr val="000000"/>
-                </a:solidFill>
-              </a:rPr>
-              <a:t>理解算法思想而非死记代码</a:t>
+              <a:t>遇到问题先画图、再想算法、最后写代码</a:t>
             </a:r>
           </a:p>
         </p:txBody>

--- a/textbook/ppt/chapter15_ppt.pptx
+++ b/textbook/ppt/chapter15_ppt.pptx
@@ -12,6 +12,7 @@
     <p:sldId id="260" r:id="rId11"/>
     <p:sldId id="261" r:id="rId12"/>
     <p:sldId id="262" r:id="rId13"/>
+    <p:sldId id="263" r:id="rId14"/>
   </p:sldIdLst>
   <p:sldSz cx="12188952" cy="6858000" type="screen4x3"/>
   <p:notesSz cx="6858000" cy="9144000"/>
@@ -3752,6 +3753,91 @@
                 </a:solidFill>
               </a:rPr>
               <a:t>遇到问题先画图、再想算法、最后写代码</a:t>
+            </a:r>
+          </a:p>
+        </p:txBody>
+      </p:sp>
+    </p:spTree>
+  </p:cSld>
+  <p:clrMapOvr>
+    <a:masterClrMapping/>
+  </p:clrMapOvr>
+</p:sld>
+</file>
+
+<file path=ppt/slides/slide8.xml><?xml version="1.0" encoding="utf-8"?>
+<p:sld xmlns:a="http://schemas.openxmlformats.org/drawingml/2006/main" xmlns:p="http://schemas.openxmlformats.org/presentationml/2006/main" xmlns:r="http://schemas.openxmlformats.org/officeDocument/2006/relationships">
+  <p:cSld>
+    <p:spTree>
+      <p:nvGrpSpPr>
+        <p:cNvPr id="1" name=""/>
+        <p:cNvGrpSpPr/>
+        <p:nvPr/>
+      </p:nvGrpSpPr>
+      <p:grpSpPr/>
+      <p:sp>
+        <p:nvSpPr>
+          <p:cNvPr id="2" name="TextBox 1"/>
+          <p:cNvSpPr txBox="1"/>
+          <p:nvPr/>
+        </p:nvSpPr>
+        <p:spPr>
+          <a:xfrm>
+            <a:off x="457200" y="274320"/>
+            <a:ext cx="10972800" cy="731520"/>
+          </a:xfrm>
+          <a:prstGeom prst="rect">
+            <a:avLst/>
+          </a:prstGeom>
+          <a:noFill/>
+        </p:spPr>
+        <p:txBody>
+          <a:bodyPr wrap="none">
+            <a:spAutoFit/>
+          </a:bodyPr>
+          <a:lstStyle/>
+          <a:p>
+            <a:r>
+              <a:rPr sz="2400" b="1">
+                <a:solidFill>
+                  <a:srgbClr val="8B0000"/>
+                </a:solidFill>
+              </a:rPr>
+              <a:t>本章概览</a:t>
+            </a:r>
+          </a:p>
+        </p:txBody>
+      </p:sp>
+      <p:sp>
+        <p:nvSpPr>
+          <p:cNvPr id="3" name="TextBox 2"/>
+          <p:cNvSpPr txBox="1"/>
+          <p:nvPr/>
+        </p:nvSpPr>
+        <p:spPr>
+          <a:xfrm>
+            <a:off x="457200" y="1097280"/>
+            <a:ext cx="10972800" cy="5029200"/>
+          </a:xfrm>
+          <a:prstGeom prst="rect">
+            <a:avLst/>
+          </a:prstGeom>
+          <a:noFill/>
+        </p:spPr>
+        <p:txBody>
+          <a:bodyPr wrap="none">
+            <a:spAutoFit/>
+          </a:bodyPr>
+          <a:lstStyle/>
+          <a:p/>
+          <a:p>
+            <a:r>
+              <a:rPr sz="1600">
+                <a:solidFill>
+                  <a:srgbClr val="000000"/>
+                </a:solidFill>
+              </a:rPr>
+              <a:t>本章学习动态规划——背包问题、区间DP、状态压缩DP、树形DP。</a:t>
             </a:r>
           </a:p>
         </p:txBody>

--- a/textbook/ppt/chapter15_ppt.pptx
+++ b/textbook/ppt/chapter15_ppt.pptx
@@ -13,6 +13,7 @@
     <p:sldId id="261" r:id="rId12"/>
     <p:sldId id="262" r:id="rId13"/>
     <p:sldId id="263" r:id="rId14"/>
+    <p:sldId id="264" r:id="rId15"/>
   </p:sldIdLst>
   <p:sldSz cx="12188952" cy="6858000" type="screen4x3"/>
   <p:notesSz cx="6858000" cy="9144000"/>
@@ -3722,7 +3723,7 @@
                   <a:srgbClr val="000000"/>
                 </a:solidFill>
               </a:rPr>
-              <a:t>本章学习了第15章的核心概念</a:t>
+              <a:t/>
             </a:r>
           </a:p>
           <a:p>
@@ -3732,7 +3733,7 @@
                   <a:srgbClr val="000000"/>
                 </a:solidFill>
               </a:rPr>
-              <a:t>多做练习是掌握算法的关键</a:t>
+              <a:t/>
             </a:r>
           </a:p>
           <a:p>
@@ -3742,7 +3743,7 @@
                   <a:srgbClr val="000000"/>
                 </a:solidFill>
               </a:rPr>
-              <a:t>理解算法思想比死记代码更重要</a:t>
+              <a:t/>
             </a:r>
           </a:p>
           <a:p>
@@ -3752,7 +3753,7 @@
                   <a:srgbClr val="000000"/>
                 </a:solidFill>
               </a:rPr>
-              <a:t>遇到问题先画图、再想算法、最后写代码</a:t>
+              <a:t/>
             </a:r>
           </a:p>
         </p:txBody>
@@ -3838,6 +3839,121 @@
                 </a:solidFill>
               </a:rPr>
               <a:t>本章学习动态规划——背包问题、区间DP、状态压缩DP、树形DP。</a:t>
+            </a:r>
+          </a:p>
+        </p:txBody>
+      </p:sp>
+    </p:spTree>
+  </p:cSld>
+  <p:clrMapOvr>
+    <a:masterClrMapping/>
+  </p:clrMapOvr>
+</p:sld>
+</file>
+
+<file path=ppt/slides/slide9.xml><?xml version="1.0" encoding="utf-8"?>
+<p:sld xmlns:a="http://schemas.openxmlformats.org/drawingml/2006/main" xmlns:p="http://schemas.openxmlformats.org/presentationml/2006/main" xmlns:r="http://schemas.openxmlformats.org/officeDocument/2006/relationships">
+  <p:cSld>
+    <p:spTree>
+      <p:nvGrpSpPr>
+        <p:cNvPr id="1" name=""/>
+        <p:cNvGrpSpPr/>
+        <p:nvPr/>
+      </p:nvGrpSpPr>
+      <p:grpSpPr/>
+      <p:sp>
+        <p:nvSpPr>
+          <p:cNvPr id="2" name="TextBox 1"/>
+          <p:cNvSpPr txBox="1"/>
+          <p:nvPr/>
+        </p:nvSpPr>
+        <p:spPr>
+          <a:xfrm>
+            <a:off x="457200" y="274320"/>
+            <a:ext cx="10972800" cy="731520"/>
+          </a:xfrm>
+          <a:prstGeom prst="rect">
+            <a:avLst/>
+          </a:prstGeom>
+          <a:noFill/>
+        </p:spPr>
+        <p:txBody>
+          <a:bodyPr wrap="none">
+            <a:spAutoFit/>
+          </a:bodyPr>
+          <a:lstStyle/>
+          <a:p>
+            <a:r>
+              <a:rPr sz="2400" b="1">
+                <a:solidFill>
+                  <a:srgbClr val="8B0000"/>
+                </a:solidFill>
+              </a:rPr>
+              <a:t>第15章 核心要点</a:t>
+            </a:r>
+          </a:p>
+        </p:txBody>
+      </p:sp>
+      <p:sp>
+        <p:nvSpPr>
+          <p:cNvPr id="3" name="TextBox 2"/>
+          <p:cNvSpPr txBox="1"/>
+          <p:nvPr/>
+        </p:nvSpPr>
+        <p:spPr>
+          <a:xfrm>
+            <a:off x="457200" y="1097280"/>
+            <a:ext cx="10972800" cy="5029200"/>
+          </a:xfrm>
+          <a:prstGeom prst="rect">
+            <a:avLst/>
+          </a:prstGeom>
+          <a:noFill/>
+        </p:spPr>
+        <p:txBody>
+          <a:bodyPr wrap="none">
+            <a:spAutoFit/>
+          </a:bodyPr>
+          <a:lstStyle/>
+          <a:p/>
+          <a:p>
+            <a:r>
+              <a:rPr sz="1600">
+                <a:solidFill>
+                  <a:srgbClr val="000000"/>
+                </a:solidFill>
+              </a:rPr>
+              <a:t>• 01背包：逆序遍历容量</a:t>
+            </a:r>
+          </a:p>
+          <a:p>
+            <a:r>
+              <a:rPr sz="1600">
+                <a:solidFill>
+                  <a:srgbClr val="000000"/>
+                </a:solidFill>
+              </a:rPr>
+              <a:t>• 完全背包：正序遍历容量</a:t>
+            </a:r>
+          </a:p>
+          <a:p>
+            <a:r>
+              <a:rPr sz="1600">
+                <a:solidFill>
+                  <a:srgbClr val="000000"/>
+                </a:solidFill>
+              </a:rPr>
+              <a:t>• 区间DP：枚举分割点</a:t>
+            </a:r>
+          </a:p>
+          <a:p>
+            <a:r>
+              <a:rPr sz="1600">
+                <a:solidFill>
+                  <a:srgbClr val="000000"/>
+                </a:solidFill>
+              </a:rPr>
+              <a:t>• 状态压缩DP：二进制掩码</a:t>
             </a:r>
           </a:p>
         </p:txBody>
